--- a/docs/pitch/SmartLease-Edge-iQOO-Hackathon-2026.pptx
+++ b/docs/pitch/SmartLease-Edge-iQOO-Hackathon-2026.pptx
@@ -4847,7 +4847,7 @@
                 </a:solidFill>
                 <a:latin typeface="Segoe UI"/>
               </a:rPr>
-              <a:t>Camera, microphone and IR blaster feed three on-device models on the iQOO 15 Hexagon NPU. Sixty seconds later, tenant and landlord hold one signed, tamper-evident move-out report. No internet at any step.</a:t>
+              <a:t>Camera, microphone and IR blaster feed three on-device models on the iQOO 15. Sixty seconds later, tenant and landlord hold one timestamped move-out report. No internet at any step, and no network permission in the manifest.</a:t>
             </a:r>
           </a:p>
         </p:txBody>
@@ -5017,7 +5017,7 @@
                 </a:solidFill>
                 <a:latin typeface="Segoe UI"/>
               </a:rPr>
-              <a:t>ON-DEVICE LLAMA 3.2 3B</a:t>
+              <a:t>ON-DEVICE VISION + ACOUSTICS</a:t>
             </a:r>
           </a:p>
         </p:txBody>
@@ -5187,7 +5187,7 @@
                 </a:solidFill>
                 <a:latin typeface="Segoe UI"/>
               </a:rPr>
-              <a:t>SIGNED PDF</a:t>
+              <a:t>SHA-256 PDF REPORT</a:t>
             </a:r>
           </a:p>
         </p:txBody>
@@ -5536,7 +5536,7 @@
                 </a:solidFill>
                 <a:latin typeface="Segoe UI"/>
               </a:rPr>
-              <a:t>Target UI · app build in progress (Days 6–10)</a:t>
+              <a:t>Target UI - representative mockup, not a screenshot</a:t>
             </a:r>
           </a:p>
         </p:txBody>
@@ -6688,7 +6688,7 @@
                 </a:solidFill>
                 <a:latin typeface="Segoe UI"/>
               </a:rPr>
-              <a:t>ExecuTorch  → Hexagon HTP</a:t>
+              <a:t>PyTorch Lite (CPU)</a:t>
             </a:r>
           </a:p>
         </p:txBody>
@@ -6771,7 +6771,7 @@
                 </a:solidFill>
                 <a:latin typeface="Segoe UI"/>
               </a:rPr>
-              <a:t>&lt;30 ms</a:t>
+              <a:t>not measured</a:t>
             </a:r>
           </a:p>
         </p:txBody>
@@ -6854,7 +6854,7 @@
                 </a:solidFill>
                 <a:latin typeface="Segoe UI"/>
               </a:rPr>
-              <a:t>XNNPACK CPU .pte (~180 ms); heuristic segmenter</a:t>
+              <a:t>Labelled colour heuristic segmenter</a:t>
             </a:r>
           </a:p>
         </p:txBody>
@@ -7020,7 +7020,7 @@
                 </a:solidFill>
                 <a:latin typeface="Segoe UI"/>
               </a:rPr>
-              <a:t>3-layer CNN + RF, INT8</a:t>
+              <a:t>Logistic regression, 36 features</a:t>
             </a:r>
           </a:p>
         </p:txBody>
@@ -7103,7 +7103,7 @@
                 </a:solidFill>
                 <a:latin typeface="Segoe UI"/>
               </a:rPr>
-              <a:t>~150 KB</a:t>
+              <a:t>73 KB</a:t>
             </a:r>
           </a:p>
         </p:txBody>
@@ -7186,7 +7186,7 @@
                 </a:solidFill>
                 <a:latin typeface="Segoe UI"/>
               </a:rPr>
-              <a:t>ExecuTorch  → Hexagon HTP</a:t>
+              <a:t>Pure Kotlin (CPU)</a:t>
             </a:r>
           </a:p>
         </p:txBody>
@@ -7269,7 +7269,7 @@
                 </a:solidFill>
                 <a:latin typeface="Segoe UI"/>
               </a:rPr>
-              <a:t>&lt;3 ms</a:t>
+              <a:t>not measured</a:t>
             </a:r>
           </a:p>
         </p:txBody>
@@ -7518,7 +7518,7 @@
                 </a:solidFill>
                 <a:latin typeface="Segoe UI"/>
               </a:rPr>
-              <a:t>Llama 3.2 3B Instruct, W4A16</a:t>
+              <a:t>Rule-based template</a:t>
             </a:r>
           </a:p>
         </p:txBody>
@@ -7601,7 +7601,7 @@
                 </a:solidFill>
                 <a:latin typeface="Segoe UI"/>
               </a:rPr>
-              <a:t>~1.5 GB</a:t>
+              <a:t>n/a</a:t>
             </a:r>
           </a:p>
         </p:txBody>
@@ -7684,7 +7684,7 @@
                 </a:solidFill>
                 <a:latin typeface="Segoe UI"/>
               </a:rPr>
-              <a:t>GenieX / QAIRT on NPU</a:t>
+              <a:t>Kotlin (CPU)</a:t>
             </a:r>
           </a:p>
         </p:txBody>
@@ -7767,7 +7767,7 @@
                 </a:solidFill>
                 <a:latin typeface="Segoe UI"/>
               </a:rPr>
-              <a:t>~15 s stream</a:t>
+              <a:t>instant</a:t>
             </a:r>
           </a:p>
         </p:txBody>
@@ -7850,7 +7850,7 @@
                 </a:solidFill>
                 <a:latin typeface="Segoe UI"/>
               </a:rPr>
-              <a:t>Llama 3.2 1B; then rule-based template</a:t>
+              <a:t>n/a - already deterministic</a:t>
             </a:r>
           </a:p>
         </p:txBody>
@@ -8059,7 +8059,7 @@
                 </a:solidFill>
                 <a:latin typeface="Segoe UI"/>
               </a:rPr>
-              <a:t>On-device data capture of venue walls and tiles · threshold tuning · NPU latency runs · IR capture of the venue AC. Driven from the laptop through Office Kit remote control and shared clipboard.</a:t>
+              <a:t>On-device data capture of venue walls and tiles - threshold tuning - latency runs - IR capture of the venue AC. Driven from the laptop through Office Kit remote control and shared clipboard.</a:t>
             </a:r>
           </a:p>
         </p:txBody>
@@ -14345,7 +14345,7 @@
                 </a:solidFill>
                 <a:latin typeface="Segoe UI"/>
               </a:rPr>
-              <a:t>Shipping before the battle (Days 3–10)</a:t>
+              <a:t>Shipped before the battle - and what did not</a:t>
             </a:r>
           </a:p>
         </p:txBody>
@@ -14384,7 +14384,7 @@
                 </a:solidFill>
                 <a:latin typeface="Segoe UI"/>
               </a:rPr>
-              <a:t>✓  YOLOv8n-Seg fine-tune on 580+ images</a:t>
+              <a:t>✓  YOLOv8n-Seg fine-tune on 2,106 images</a:t>
             </a:r>
           </a:p>
           <a:p>
@@ -14400,7 +14400,7 @@
                 </a:solidFill>
                 <a:latin typeface="Segoe UI"/>
               </a:rPr>
-              <a:t>✓  ExecuTorch INT8 export, Hexagon HTP test</a:t>
+              <a:t>✓  ExecuTorch INT8 export   ·   NEXT: HTP test</a:t>
             </a:r>
           </a:p>
           <a:p>
@@ -14416,7 +14416,7 @@
                 </a:solidFill>
                 <a:latin typeface="Segoe UI"/>
               </a:rPr>
-              <a:t>✓  Tap CNN trained on own recordings</a:t>
+              <a:t>✓  Tap classifier trained (15 taps, 8 recordings)</a:t>
             </a:r>
           </a:p>
           <a:p>
@@ -14432,7 +14432,7 @@
                 </a:solidFill>
                 <a:latin typeface="Segoe UI"/>
               </a:rPr>
-              <a:t>✓  GenieX Llama 3.2 3B narrative</a:t>
+              <a:t>NEXT:  GenieX Llama 3.2 3B narrative</a:t>
             </a:r>
           </a:p>
           <a:p>
@@ -14448,7 +14448,7 @@
                 </a:solidFill>
                 <a:latin typeface="Segoe UI"/>
               </a:rPr>
-              <a:t>✓  SHA-256 fingerprint + dual signature</a:t>
+              <a:t>✓  SHA-256 of findings on every page   ·   NEXT: dual signature</a:t>
             </a:r>
           </a:p>
           <a:p>
@@ -15609,7 +15609,7 @@
                 </a:solidFill>
                 <a:latin typeface="Segoe UI"/>
               </a:rPr>
-              <a:t>New defect class = 200 labelled images, same pipeline. New language = one LLM prompt (Tamil, Hindi). Runs on any Snapdragon 8 Gen 2+ via ExecuTorch; iQOO-exclusive parts are the IR blaster and Sensing Hub.</a:t>
+              <a:t>New defect class = 200 labelled images, same pipeline. Runs on any recent Android phone on the CPU; the IR blaster is the iQOO-specific part.</a:t>
             </a:r>
           </a:p>
         </p:txBody>
@@ -16895,7 +16895,7 @@
                 </a:solidFill>
                 <a:latin typeface="Segoe UI"/>
               </a:rPr>
-              <a:t>Trains and exports both models, ExecuTorch INT8, GenieX integration. Event day: integrate, tune to venue.</a:t>
+              <a:t>Trains and exports both models; ExecuTorch INT8 lowering. Event day: integrate, tune to venue.</a:t>
             </a:r>
           </a:p>
         </p:txBody>
@@ -18383,7 +18383,7 @@
                 </a:solidFill>
                 <a:latin typeface="Segoe UI"/>
               </a:rPr>
-              <a:t>Camera, mic, IR blaster, Sensing Hub and NPU all exercised in the demo (telemetry-visible).</a:t>
+              <a:t>Camera, mic and IR blaster all exercised in the demo. The IR blaster is the part that does not exist on most phones.</a:t>
             </a:r>
           </a:p>
         </p:txBody>
@@ -18632,7 +18632,7 @@
                 </a:solidFill>
                 <a:latin typeface="Segoe UI"/>
               </a:rPr>
-              <a:t>INT8 ExecuTorch on HTP, W4A16 Llama via GenieX, pinhole area math, published latencies.</a:t>
+              <a:t>4-class instance segmentation on-device, grouped cross-validated acoustic model, ExecuTorch INT8 lowering compiled and in the repo.</a:t>
             </a:r>
           </a:p>
         </p:txBody>
@@ -19486,7 +19486,7 @@
                 </a:solidFill>
                 <a:latin typeface="Segoe UI"/>
               </a:rPr>
-              <a:t>Multi-modal: vision + acoustics + IR + on-device LLM</a:t>
+              <a:t>Multi-modal: vision + acoustics + IR, all on-device</a:t>
             </a:r>
           </a:p>
         </p:txBody>
@@ -19852,7 +19852,7 @@
                 </a:solidFill>
                 <a:latin typeface="Segoe UI"/>
               </a:rPr>
-              <a:t>Tamper-evident, signed PDF both parties keep</a:t>
+              <a:t>Offline PDF report carrying a SHA-256 of its own findings</a:t>
             </a:r>
           </a:p>
         </p:txBody>
@@ -20595,7 +20595,7 @@
                 </a:solidFill>
                 <a:latin typeface="Segoe UI"/>
               </a:rPr>
-              <a:t>Confidence below 0.30 is hidden, 0.30–0.50 is marked 'review', and the user can dismiss any detection. The report shows confidence per item.</a:t>
+              <a:t>Every detection is shown with its confidence and with the segmenter that produced it. Our training set has no clean-wall negatives, so we expect false positives on grout lines, shadows and cables - that is the first gap we are closing.</a:t>
             </a:r>
           </a:p>
         </p:txBody>
@@ -20761,7 +20761,7 @@
                 </a:solidFill>
                 <a:latin typeface="Segoe UI"/>
               </a:rPr>
-              <a:t>Pinhole model: area = pixels × Z²/(fx·fy). About ±10% with ARCore depth, ±20% with a typed distance. Good enough for severity bands, stated as such.</a:t>
+              <a:t>It is not a measurement yet. We report the share of the frame the mask covers. The pinhole conversion needs camera intrinsics and a distance, and neither is read on device today.</a:t>
             </a:r>
           </a:p>
         </p:txBody>
@@ -20927,7 +20927,7 @@
                 </a:solidFill>
                 <a:latin typeface="Segoe UI"/>
               </a:rPr>
-              <a:t>Any Snapdragon 8 Gen 2+ via ExecuTorch. The IR blaster and Sensing Hub paths are iQOO/vivo-specific and degrade gracefully.</a:t>
+              <a:t>Any recent Android phone - the model runs on the CPU via PyTorch Lite. The IR blaster is the part that does not exist on most phones.</a:t>
             </a:r>
           </a:p>
         </p:txBody>
@@ -21093,7 +21093,7 @@
                 </a:solidFill>
                 <a:latin typeface="Segoe UI"/>
               </a:rPr>
-              <a:t>No INTERNET permission in the manifest. No account, no analytics. The PDF is the only artefact and the user chooses where it goes.</a:t>
+              <a:t>No INTERNET permission, allowBackup off, every backup domain excluded - the report PDF is not eligible for cloud backup. Sharing is a user-initiated share sheet, scoped to one file.</a:t>
             </a:r>
           </a:p>
         </p:txBody>
@@ -21259,7 +21259,7 @@
                 </a:solidFill>
                 <a:latin typeface="Segoe UI"/>
               </a:rPr>
-              <a:t>It cannot measure area, cannot hear a hollow tile, cannot fire an IR code, cannot sign a PDF, and needs internet in a flat that has none.</a:t>
+              <a:t>It cannot report defect area, cannot hear a hollow tile, cannot fire an IR code, and needs internet in a flat that has none.</a:t>
             </a:r>
           </a:p>
         </p:txBody>
@@ -21425,7 +21425,7 @@
                 </a:solidFill>
                 <a:latin typeface="Segoe UI"/>
               </a:rPr>
-              <a:t>6 MB INT8 fits HTP memory and runs in ~30 ms; larger models exceed the budget without a meaningful mAP gain on wall defects.</a:t>
+              <a:t>6 MB INT8 is the size we lowered for HTP; on the CPU the nano model is what keeps a capture responsive. We have not measured latency on either yet.</a:t>
             </a:r>
           </a:p>
         </p:txBody>
@@ -21591,7 +21591,7 @@
                 </a:solidFill>
                 <a:latin typeface="Segoe UI"/>
               </a:rPr>
-              <a:t>Both models and the export path are done before Sep 12. Live: real AC IR capture, venue threshold tuning, integration polish. We say this plainly.</a:t>
+              <a:t>Both models and the ExecuTorch export path are done before Sep 12. Live: real AC IR capture, venue threshold tuning, integration polish. HTP integration is not done.</a:t>
             </a:r>
           </a:p>
         </p:txBody>
@@ -21757,7 +21757,7 @@
                 </a:solidFill>
                 <a:latin typeface="Segoe UI"/>
               </a:rPr>
-              <a:t>Free for consumers; ₹299–499 per signed report; B2B2C licensing to co-living operators and rental platforms is the revenue anchor.</a:t>
+              <a:t>Free for consumers; Rs 299-499 per report; B2B2C licensing to co-living operators and rental platforms is the revenue anchor.</a:t>
             </a:r>
           </a:p>
         </p:txBody>
@@ -22691,7 +22691,7 @@
                 </a:solidFill>
                 <a:latin typeface="Segoe UI"/>
               </a:rPr>
-              <a:t>Llama 3.2 3B ~10 tok/s W4A16 via Genie on Snapdragon 8 Elite</a:t>
+              <a:t>Training data: four Roboflow Universe datasets, CC BY 4.0</a:t>
             </a:r>
           </a:p>
         </p:txBody>
@@ -22730,7 +22730,7 @@
                 </a:solidFill>
                 <a:latin typeface="Consolas"/>
               </a:rPr>
-              <a:t>aihub.qualcomm.com (Llama-v3.2-3B-Instruct) · grapeup.com benchmark</a:t>
+              <a:t>infrastructure-monitoring - structural-defects - building-anomalies - concrete-defects (universe.roboflow.com)</a:t>
             </a:r>
           </a:p>
         </p:txBody>
@@ -24908,7 +24908,7 @@
                 </a:solidFill>
                 <a:latin typeface="Segoe UI"/>
               </a:rPr>
-              <a:t>AR alignment and defect overlays update per frame. A 400 ms cloud round-trip makes the overlay swim; the NPU answers in under 30 ms.</a:t>
+              <a:t>AR alignment and defect overlays update per frame. A 400 ms cloud round-trip makes the overlay swim; on-device inference answers without one.</a:t>
             </a:r>
           </a:p>
         </p:txBody>
@@ -25110,7 +25110,7 @@
                 </a:solidFill>
                 <a:latin typeface="Segoe UI"/>
               </a:rPr>
-              <a:t>Hexagon NPU in Snapdragon 8 Elite Gen 5 vs prior gen (Qualcomm)</a:t>
+              <a:t>Hexagon NPU in Snapdragon 8 Elite Gen 5 vs prior gen (Qualcomm) - headroom we have not taken up yet</a:t>
             </a:r>
           </a:p>
         </p:txBody>
@@ -25149,7 +25149,7 @@
                 </a:solidFill>
                 <a:latin typeface="Segoe UI"/>
               </a:rPr>
-              <a:t>~10 tok/s</a:t>
+              <a:t>36 MACs</a:t>
             </a:r>
           </a:p>
         </p:txBody>
@@ -25188,7 +25188,7 @@
                 </a:solidFill>
                 <a:latin typeface="Segoe UI"/>
               </a:rPr>
-              <a:t>Llama 3.2 3B, W4A16, on the NPU via Qualcomm GenieX runtime</a:t>
+              <a:t>The whole tap classifier: a 36-feature logistic regression, small enough to run on any core</a:t>
             </a:r>
           </a:p>
         </p:txBody>
@@ -25227,7 +25227,7 @@
                 </a:solidFill>
                 <a:latin typeface="Segoe UI"/>
               </a:rPr>
-              <a:t>&lt;30 ms</a:t>
+              <a:t>2,106</a:t>
             </a:r>
           </a:p>
         </p:txBody>
@@ -25266,7 +25266,7 @@
                 </a:solidFill>
                 <a:latin typeface="Segoe UI"/>
               </a:rPr>
-              <a:t>YOLOv8n-Seg INT8 per frame on the Hexagon HTP (target, ExecuTorch)</a:t>
+              <a:t>labelled defect images behind the 4-class YOLOv8n-Seg segmenter that ships in the APK today</a:t>
             </a:r>
           </a:p>
         </p:txBody>
@@ -26068,7 +26068,7 @@
                 </a:solidFill>
                 <a:latin typeface="Segoe UI"/>
               </a:rPr>
-              <a:t>Knuckle-tap a tile. A 150 ms transient is classified hollow or solid by a 150 KB CNN on the NPU.</a:t>
+              <a:t>Knuckle-tap a tile. A 250 ms transient becomes 36 spectral features and a logistic regression calls it hollow or solid, on the CPU.</a:t>
             </a:r>
           </a:p>
         </p:txBody>
@@ -26330,7 +26330,7 @@
                 </a:solidFill>
                 <a:latin typeface="Segoe UI"/>
               </a:rPr>
-              <a:t>Llama 3.2 3B writes the findings into a plain-language PDF with cost bands, timestamp and SHA-256.</a:t>
+              <a:t>The findings are written into a plain-language PDF on the phone, with a timestamp and a SHA-256 of exactly those findings on every page. Rule-based text today.</a:t>
             </a:r>
           </a:p>
         </p:txBody>
@@ -26439,7 +26439,7 @@
                 </a:solidFill>
                 <a:latin typeface="Segoe UI"/>
               </a:rPr>
-              <a:t>Plus a functional check the camera cannot do: </a:t>
+              <a:t>Plus a check the camera cannot do: the IR blaster fires a remote code at the AC. Android ConsumerIrManager is transmit-only, so the report records that the command was sent - closing the loop with a mic listen-back is the next step.</a:t>
             </a:r>
             <a:r>
               <a:rPr sz="1350" b="0" i="0">
@@ -26448,7 +26448,7 @@
                 </a:solidFill>
                 <a:latin typeface="Segoe UI"/>
               </a:rPr>
-              <a:t>the IR blaster fires the captured remote code at the AC, the mic confirms the compressor starts, and the report records 'works', not just 'looks fine'.</a:t>
+              <a:t/>
             </a:r>
           </a:p>
         </p:txBody>
@@ -26487,7 +26487,7 @@
                 </a:solidFill>
                 <a:latin typeface="Segoe UI"/>
               </a:rPr>
-              <a:t>Screens: target UI, build in progress (Days 6–10). Live demo runs the real app.</a:t>
+              <a:t>Screens are representative mockups. The live demo runs the real app.</a:t>
             </a:r>
           </a:p>
         </p:txBody>
@@ -27114,7 +27114,7 @@
                 </a:solidFill>
                 <a:latin typeface="Segoe UI"/>
               </a:rPr>
-              <a:t>Open the move-in photo. AR ghost-overlay + OIS lock the same angle within 1°.</a:t>
+              <a:t>Point at the wall and press Set Baseline. Rotation-vector tracking records the pose; later captures report drift from it in degrees.</a:t>
             </a:r>
           </a:p>
         </p:txBody>
@@ -27462,7 +27462,7 @@
                 </a:solidFill>
                 <a:latin typeface="Consolas"/>
               </a:rPr>
-              <a:t>NPU · YOLOv8n-Seg INT8</a:t>
+              <a:t>CPU - YOLOv8n-Seg via PyTorch Lite</a:t>
             </a:r>
           </a:p>
         </p:txBody>
@@ -27732,7 +27732,7 @@
                 </a:solidFill>
                 <a:latin typeface="Segoe UI"/>
               </a:rPr>
-              <a:t>Knuckle-tap the tile board. Ring fills: HOLLOW, 0.91. Speaker confirms with a tone.</a:t>
+              <a:t>Knuckle-tap the tile board. The findings log prints HOLLOW with the model confidence and its cross-validated accuracy.</a:t>
             </a:r>
           </a:p>
         </p:txBody>
@@ -27771,7 +27771,7 @@
                 </a:solidFill>
                 <a:latin typeface="Consolas"/>
               </a:rPr>
-              <a:t>Mic · Tap CNN · Sensing Hub</a:t>
+              <a:t>Mic - AudioRecord - logistic regression</a:t>
             </a:r>
           </a:p>
         </p:txBody>
@@ -28041,7 +28041,7 @@
                 </a:solidFill>
                 <a:latin typeface="Segoe UI"/>
               </a:rPr>
-              <a:t>Fire the captured code at the venue AC. Compressor starts. Logged as functional.</a:t>
+              <a:t>Fire the code at the venue AC. Logged as transmitted: Android cannot receive IR, so this loop is open.</a:t>
             </a:r>
           </a:p>
         </p:txBody>
@@ -28350,7 +28350,7 @@
                 </a:solidFill>
                 <a:latin typeface="Segoe UI"/>
               </a:rPr>
-              <a:t>Tap Generate. Llama 3.2 3B streams the narrative. PDF with SHA-256 lands in ~15 s, shared to laptop via Office Kit.</a:t>
+              <a:t>Tap Generate. The findings render to a PDF on the phone in under a second, with their SHA-256 on every page, then straight to the share sheet.</a:t>
             </a:r>
           </a:p>
         </p:txBody>
@@ -28389,7 +28389,7 @@
                 </a:solidFill>
                 <a:latin typeface="Consolas"/>
               </a:rPr>
-              <a:t>GenieX · PdfDocument</a:t>
+              <a:t>Room DB - PdfDocument</a:t>
             </a:r>
           </a:p>
         </p:txBody>
@@ -28944,7 +28944,7 @@
                 </a:solidFill>
                 <a:latin typeface="Segoe UI"/>
               </a:rPr>
-              <a:t>YOLOv8n-Seg fine-tuned on 580+ labelled wall-defect images (Roboflow COCO-Seg auto-converted to YOLO-Seg). Classes: crack, stain, mould, peeling, hole.</a:t>
+              <a:t>YOLOv8n-Seg fine-tuned on 2,106 labelled defect images (1,796 train / 203 val / 107 test), merged from four CC BY 4.0 Roboflow datasets. Classes: crack, peeling, spalling, stain_mould.</a:t>
             </a:r>
           </a:p>
         </p:txBody>
@@ -29022,7 +29022,7 @@
                 </a:solidFill>
                 <a:latin typeface="Segoe UI"/>
               </a:rPr>
-              <a:t>torch.export  → PT2E quantise (QnnQuantizer 8a8w)  → ExecuTorch lower  → .pte on the Hexagon HTP. ~6 MB INT8. XNNPACK CPU fallback ships in the same APK.</a:t>
+              <a:t>torch.export -&gt; PT2E quantise (QnnQuantizer 8a8w) -&gt; ExecuTorch lower -&gt; .pte, compiled and in the repo under qnn_android_bundle/. Not yet wired into the APK: the shipping app runs the model on the CPU via PyTorch Lite.</a:t>
             </a:r>
           </a:p>
         </p:txBody>
@@ -29100,7 +29100,7 @@
                 </a:solidFill>
                 <a:latin typeface="Segoe UI"/>
               </a:rPr>
-              <a:t>Area = mask pixels × Z² / (fₓ·fᵧ) using the pinhole model; Z from ARCore depth (±10%) or a typed wall distance (±20%).</a:t>
+              <a:t>Area is reported as the share of the frame the mask covers. There is no depth sensor and no camera-intrinsics read on device, so this is not yet a physical measurement - the pinhole conversion exists in the Python pipeline only.</a:t>
             </a:r>
           </a:p>
         </p:txBody>
@@ -29178,7 +29178,7 @@
                 </a:solidFill>
                 <a:latin typeface="Segoe UI"/>
               </a:rPr>
-              <a:t>Severity bands by area and class. Confidence &lt; 0.30 hidden; 0.30–0.50 shown as 'review'. Users can dismiss a detection.</a:t>
+              <a:t>Detections below 0.25 confidence are discarded. Every surviving detection is shown with its confidence and labelled with the segmenter that produced it.</a:t>
             </a:r>
           </a:p>
         </p:txBody>
@@ -29372,7 +29372,7 @@
                 </a:solidFill>
                 <a:latin typeface="Segoe UI"/>
               </a:rPr>
-              <a:t>Today: deterministic heuristic segmenter runs in the app. Days 3–8: fine-tune, export, NPU test on any Snapdragon 8-series. Target metrics: 75%+ mAP on held-out wall images, &lt;30 ms per frame on HTP. Numbers on the latency chart are targets until measured.</a:t>
+              <a:t>Honest status: the trained 4-class segmenter ships in the APK and runs on the CPU; a colour heuristic is the labelled fallback if it fails to load. No validation run is recorded yet, and the splits share video frames across train/val/test, so any mAP we quoted would be inflated.</a:t>
             </a:r>
           </a:p>
         </p:txBody>
@@ -29796,7 +29796,7 @@
                 </a:solidFill>
                 <a:latin typeface="Segoe UI"/>
               </a:rPr>
-              <a:t>Sensing Hub keeps a low-power listener up. An RMS spike triggers a 150 ms crop at 16 kHz.</a:t>
+              <a:t>A button press opens AudioRecord at 44.1 kHz for 1.2 s; the tap is located by peak envelope. No always-on listener - the Qualcomm Sensing Hub audio path is not reachable from a third-party app.</a:t>
             </a:r>
           </a:p>
         </p:txBody>
@@ -29874,7 +29874,7 @@
                 </a:solidFill>
                 <a:latin typeface="Segoe UI"/>
               </a:rPr>
-              <a:t>64-band log-Mel spectrogram (64×19). Hollow taps ring above 1.5 kHz and die in ~10 ms; solid taps sit below 1 kHz and ring longer.</a:t>
+              <a:t>250 ms crop, resampled to 22.05 kHz, peak-normalised. 40-band log-Mel -&gt; 13 MFCCs -&gt; 36 features: MFCC mean/std, spectral moments, ZCR, decay time, band ratios.</a:t>
             </a:r>
           </a:p>
         </p:txBody>
@@ -29952,7 +29952,7 @@
                 </a:solidFill>
                 <a:latin typeface="Segoe UI"/>
               </a:rPr>
-              <a:t>3-layer CNN, ~150 KB INT8 on the NPU (&lt;3 ms), ensembled with a Random Forest on decay time and high-frequency ratio.</a:t>
+              <a:t>Logistic regression over those 36 features - 36 multiply-adds on the CPU. Ships as a 73 KB JSON carrying the mel filterbank and DCT basis, so Kotlin cannot drift from the Python trainer.</a:t>
             </a:r>
           </a:p>
         </p:txBody>
@@ -30115,7 +30115,7 @@
                 </a:solidFill>
                 <a:latin typeface="Segoe UI"/>
               </a:rPr>
-              <a:t>Training set: 100+ own recordings (50 hollow, 50 solid) captured on the demo phone, plus Kaggle/Roboflow tap audio. Figure is an illustrative signal model.</a:t>
+              <a:t>Training set: 15 taps from 8 recordings. Grouped leave-one-recording-out accuracy 80% (95% CI 62-96%) against a 53% majority baseline. Small - and we report the cross-validated figure with its interval, never the training score.</a:t>
             </a:r>
           </a:p>
         </p:txBody>
@@ -30154,7 +30154,7 @@
                 </a:solidFill>
                 <a:latin typeface="Segoe UI"/>
               </a:rPr>
-              <a:t>Dual stereo speakers play a confirmation tone so a room of judges hears the verdict.</a:t>
+              <a:t>The verdict, its confidence and the model cross-validated accuracy are all printed in the findings log.</a:t>
             </a:r>
           </a:p>
         </p:txBody>
@@ -30258,7 +30258,7 @@
                 </a:solidFill>
                 <a:latin typeface="Segoe UI"/>
               </a:rPr>
-              <a:t>Every byte stays on the phone: sensors, NPU, on-device LLM, signed PDF.</a:t>
+              <a:t>Every byte stays on the phone: sensors, on-device models, local database, offline PDF.</a:t>
             </a:r>
           </a:p>
         </p:txBody>
@@ -30639,7 +30639,7 @@
                 </a:solidFill>
                 <a:latin typeface="Segoe UI"/>
               </a:rPr>
-              <a:t>Stereo mics · 16 kHz PCM · Sensing Hub</a:t>
+              <a:t>Stereo mics · 44.1 kHz PCM · AudioRecord</a:t>
             </a:r>
           </a:p>
         </p:txBody>
@@ -30717,7 +30717,7 @@
                 </a:solidFill>
                 <a:latin typeface="Segoe UI"/>
               </a:rPr>
-              <a:t>Rotation vector · ARCore depth</a:t>
+              <a:t>Rotation vector (TYPE_ROTATION_VECTOR)</a:t>
             </a:r>
           </a:p>
         </p:txBody>
@@ -30960,7 +30960,7 @@
                 </a:solidFill>
                 <a:latin typeface="Segoe UI"/>
               </a:rPr>
-              <a:t>HEXAGON NPU (HTP)</a:t>
+              <a:t>HOST CPU - MODELS</a:t>
             </a:r>
           </a:p>
         </p:txBody>
@@ -30999,7 +30999,7 @@
                 </a:solidFill>
                 <a:latin typeface="Segoe UI"/>
               </a:rPr>
-              <a:t>• YOLOv8n-Seg INT8 .pte via ExecuTorch, &lt;30 ms</a:t>
+              <a:t>- YOLOv8n-Seg, 4-class, via PyTorch Lite</a:t>
             </a:r>
           </a:p>
           <a:p>
@@ -31015,7 +31015,7 @@
                 </a:solidFill>
                 <a:latin typeface="Segoe UI"/>
               </a:rPr>
-              <a:t>• Tap CNN INT8 .pte, 150 KB, &lt;3 ms</a:t>
+              <a:t>- Tap classifier: 36-feature logistic regression</a:t>
             </a:r>
           </a:p>
           <a:p>
@@ -31031,7 +31031,7 @@
                 </a:solidFill>
                 <a:latin typeface="Segoe UI"/>
               </a:rPr>
-              <a:t>• Llama 3.2 3B W4A16 via GenieX / QAIRT, ~10 tok/s</a:t>
+              <a:t>- ExecuTorch INT8 .pte compiled and in repo; HTP integration not yet in the APK</a:t>
             </a:r>
           </a:p>
         </p:txBody>
@@ -31142,7 +31142,7 @@
                 </a:solidFill>
                 <a:latin typeface="Segoe UI"/>
               </a:rPr>
-              <a:t>HOST CPU</a:t>
+              <a:t>HOST CPU - PIPELINE</a:t>
             </a:r>
           </a:p>
         </p:txBody>
@@ -31181,7 +31181,7 @@
                 </a:solidFill>
                 <a:latin typeface="Segoe UI"/>
               </a:rPr>
-              <a:t>• NMS · mask assembly · area from pinhole model</a:t>
+              <a:t>- NMS - mask assembly - area as % of frame</a:t>
             </a:r>
           </a:p>
           <a:p>
@@ -31213,7 +31213,7 @@
                 </a:solidFill>
                 <a:latin typeface="Segoe UI"/>
               </a:rPr>
-              <a:t>• PDF render · SHA-256 · Room DB</a:t>
+              <a:t>- PDF render - SHA-256 of findings - Room DB</a:t>
             </a:r>
           </a:p>
         </p:txBody>
@@ -31379,7 +31379,7 @@
                 </a:solidFill>
                 <a:latin typeface="Segoe UI"/>
               </a:rPr>
-              <a:t>• Replay at 38 kHz  → verify via mic</a:t>
+              <a:t>- Replay at 38 kHz (Android has no IR receive path)</a:t>
             </a:r>
           </a:p>
           <a:p>
@@ -31653,7 +31653,7 @@
                 </a:solidFill>
                 <a:latin typeface="Segoe UI"/>
               </a:rPr>
-              <a:t>OUTPUT  </a:t>
+              <a:t>OUTPUT   Offline PDF: timestamp + session ID + SHA-256 of the findings on every page, rendered on the phone and shared by Intent or Office Kit. No cloud call at any stage, no INTERNET permission, backups disabled.</a:t>
             </a:r>
             <a:r>
               <a:rPr sz="1050" b="0" i="0">
@@ -31662,7 +31662,7 @@
                 </a:solidFill>
                 <a:latin typeface="Segoe UI"/>
               </a:rPr>
-              <a:t>Signed PDF: timestamp + session ID + SHA-256 fingerprint, both parties sign on-screen, shared by Intent or Office Kit. No cloud call at any stage.</a:t>
+              <a:t/>
             </a:r>
           </a:p>
         </p:txBody>
@@ -32546,7 +32546,7 @@
                 </a:solidFill>
                 <a:latin typeface="Segoe UI"/>
               </a:rPr>
-              <a:t>Runs all three models: segmenter, tap CNN, Llama 3.2 3B report writer</a:t>
+              <a:t>Headroom for the models, not yet used: all three run on the CPU today. The ExecuTorch INT8 lowering is compiled and in the repo.</a:t>
             </a:r>
           </a:p>
         </p:txBody>
@@ -32795,7 +32795,7 @@
                 </a:solidFill>
                 <a:latin typeface="Segoe UI"/>
               </a:rPr>
-              <a:t>OIS steadies the AR baseline overlay; ultrawide captures a full wall; telephoto inspects hairline cracks from 3 m</a:t>
+              <a:t>OIS steadies handheld capture; ultrawide frames a full wall; telephoto reaches a high-ceiling crack. No AR overlay is rendered yet.</a:t>
             </a:r>
           </a:p>
         </p:txBody>
@@ -33044,7 +33044,7 @@
                 </a:solidFill>
                 <a:latin typeface="Segoe UI"/>
               </a:rPr>
-              <a:t>Fires the AC, geyser or TV remote code to prove the appliance works, not just looks fine</a:t>
+              <a:t>Fires an AC, geyser or TV remote code. Android cannot receive IR, so this records that the command was sent, not that the unit responded.</a:t>
             </a:r>
           </a:p>
         </p:txBody>
@@ -33127,7 +33127,7 @@
                 </a:solidFill>
                 <a:latin typeface="Segoe UI"/>
               </a:rPr>
-              <a:t>Stereo mics + Sensing Hub</a:t>
+              <a:t>Stereo mics</a:t>
             </a:r>
           </a:p>
         </p:txBody>
@@ -33210,7 +33210,7 @@
                 </a:solidFill>
                 <a:latin typeface="Segoe UI"/>
               </a:rPr>
-              <a:t>Always-on, low-power audio path</a:t>
+              <a:t>Dual mic array, 44.1 kHz PCM capture</a:t>
             </a:r>
           </a:p>
         </p:txBody>
@@ -33293,7 +33293,7 @@
                 </a:solidFill>
                 <a:latin typeface="Segoe UI"/>
               </a:rPr>
-              <a:t>Detects the tap transient without waking the main NPU; mic confirms the compressor starts</a:t>
+              <a:t>Captures the knuckle-tap transient for the hollow/solid classifier. Not always-on: the Sensing Hub audio path has no third-party API.</a:t>
             </a:r>
           </a:p>
         </p:txBody>
@@ -33542,7 +33542,7 @@
                 </a:solidFill>
                 <a:latin typeface="Segoe UI"/>
               </a:rPr>
-              <a:t>AR overlay stays legible in a sunlit Chennai flat at 2 pm</a:t>
+              <a:t>Keeps the camera preview and the findings log legible in a sunlit Chennai flat at 2 pm.</a:t>
             </a:r>
           </a:p>
         </p:txBody>
@@ -33708,7 +33708,7 @@
                 </a:solidFill>
                 <a:latin typeface="Segoe UI"/>
               </a:rPr>
-              <a:t>Sustained NPU load without throttling</a:t>
+              <a:t>Sustained load without throttling</a:t>
             </a:r>
           </a:p>
         </p:txBody>
@@ -33791,7 +33791,7 @@
                 </a:solidFill>
                 <a:latin typeface="Segoe UI"/>
               </a:rPr>
-              <a:t>Twenty-room walkthrough on one charge; inference speed does not degrade mid-demo</a:t>
+              <a:t>Twenty-room walkthrough on one charge without the inference slowing down mid-demo.</a:t>
             </a:r>
           </a:p>
         </p:txBody>
